--- a/presentations/DONE_0512_Stablecoin_Exorbitant_Privilege.pptx
+++ b/presentations/DONE_0512_Stablecoin_Exorbitant_Privilege.pptx
@@ -222,7 +222,7 @@
           <a:p>
             <a:fld id="{83EC6BE1-A4B7-974B-915D-03C1CF773469}" type="datetimeFigureOut">
               <a:rPr kumimoji="1" lang="ko-KR" altLang="en-US" smtClean="0"/>
-              <a:t>2026. 5. 12.</a:t>
+              <a:t>2026. 6. 2.</a:t>
             </a:fld>
             <a:endParaRPr kumimoji="1" lang="ko-KR" altLang="en-US"/>
           </a:p>
@@ -3221,7 +3221,7 @@
           <a:p>
             <a:fld id="{A1C20BC9-927F-2446-AECF-AD03478862A8}" type="datetime1">
               <a:rPr lang="ko-KR" altLang="en-US" smtClean="0"/>
-              <a:t>2026. 5. 12.</a:t>
+              <a:t>2026. 6. 2.</a:t>
             </a:fld>
             <a:endParaRPr lang="en-US"/>
           </a:p>
@@ -3384,7 +3384,7 @@
           <a:p>
             <a:fld id="{C6249789-0936-6140-A27E-880DD3FC8288}" type="datetime1">
               <a:rPr lang="ko-KR" altLang="en-US" smtClean="0"/>
-              <a:t>2026. 5. 12.</a:t>
+              <a:t>2026. 6. 2.</a:t>
             </a:fld>
             <a:endParaRPr lang="en-US"/>
           </a:p>
@@ -3557,7 +3557,7 @@
           <a:p>
             <a:fld id="{2EEA7C15-8000-344F-B602-B2D07D350112}" type="datetime1">
               <a:rPr lang="ko-KR" altLang="en-US" smtClean="0"/>
-              <a:t>2026. 5. 12.</a:t>
+              <a:t>2026. 6. 2.</a:t>
             </a:fld>
             <a:endParaRPr lang="en-US"/>
           </a:p>
@@ -3720,7 +3720,7 @@
           <a:p>
             <a:fld id="{59EB9A13-99E8-C946-8422-525720E95D70}" type="datetime1">
               <a:rPr lang="ko-KR" altLang="en-US" smtClean="0"/>
-              <a:t>2026. 5. 12.</a:t>
+              <a:t>2026. 6. 2.</a:t>
             </a:fld>
             <a:endParaRPr lang="en-US"/>
           </a:p>
@@ -3960,7 +3960,7 @@
           <a:p>
             <a:fld id="{8D0CDB8A-853B-5741-A8F8-E6BEBA996F73}" type="datetime1">
               <a:rPr lang="ko-KR" altLang="en-US" smtClean="0"/>
-              <a:t>2026. 5. 12.</a:t>
+              <a:t>2026. 6. 2.</a:t>
             </a:fld>
             <a:endParaRPr lang="en-US"/>
           </a:p>
@@ -4240,7 +4240,7 @@
           <a:p>
             <a:fld id="{1F728279-CA28-1D46-8FD5-CDFF7ECB90D0}" type="datetime1">
               <a:rPr lang="ko-KR" altLang="en-US" smtClean="0"/>
-              <a:t>2026. 5. 12.</a:t>
+              <a:t>2026. 6. 2.</a:t>
             </a:fld>
             <a:endParaRPr lang="en-US"/>
           </a:p>
@@ -4654,7 +4654,7 @@
           <a:p>
             <a:fld id="{985D133D-FD79-3A46-B04D-862544638E9C}" type="datetime1">
               <a:rPr lang="ko-KR" altLang="en-US" smtClean="0"/>
-              <a:t>2026. 5. 12.</a:t>
+              <a:t>2026. 6. 2.</a:t>
             </a:fld>
             <a:endParaRPr lang="en-US"/>
           </a:p>
@@ -4766,7 +4766,7 @@
           <a:p>
             <a:fld id="{5407E052-61D9-C94D-A482-A8E176EE8505}" type="datetime1">
               <a:rPr lang="ko-KR" altLang="en-US" smtClean="0"/>
-              <a:t>2026. 5. 12.</a:t>
+              <a:t>2026. 6. 2.</a:t>
             </a:fld>
             <a:endParaRPr lang="en-US"/>
           </a:p>
@@ -4856,7 +4856,7 @@
           <a:p>
             <a:fld id="{188ED6F0-C5A3-C147-B913-05FB2436882F}" type="datetime1">
               <a:rPr lang="ko-KR" altLang="en-US" smtClean="0"/>
-              <a:t>2026. 5. 12.</a:t>
+              <a:t>2026. 6. 2.</a:t>
             </a:fld>
             <a:endParaRPr lang="en-US"/>
           </a:p>
@@ -5126,7 +5126,7 @@
           <a:p>
             <a:fld id="{384C738C-69A7-E546-A7AB-BA1A924CC786}" type="datetime1">
               <a:rPr lang="ko-KR" altLang="en-US" smtClean="0"/>
-              <a:t>2026. 5. 12.</a:t>
+              <a:t>2026. 6. 2.</a:t>
             </a:fld>
             <a:endParaRPr lang="en-US"/>
           </a:p>
@@ -5373,7 +5373,7 @@
           <a:p>
             <a:fld id="{EACC9D5A-263E-3C4A-980D-8614F39CB45A}" type="datetime1">
               <a:rPr lang="ko-KR" altLang="en-US" smtClean="0"/>
-              <a:t>2026. 5. 12.</a:t>
+              <a:t>2026. 6. 2.</a:t>
             </a:fld>
             <a:endParaRPr lang="en-US"/>
           </a:p>
@@ -5579,7 +5579,7 @@
           <a:p>
             <a:fld id="{8FF2B9D6-7B72-8E44-8AB8-D2FC2E171B08}" type="datetime1">
               <a:rPr lang="ko-KR" altLang="en-US" smtClean="0"/>
-              <a:t>2026. 5. 12.</a:t>
+              <a:t>2026. 6. 2.</a:t>
             </a:fld>
             <a:endParaRPr lang="en-US"/>
           </a:p>
